--- a/docs/pptx/carbo/ritu-carbo-cox-linear-ratio-death_10pct.pptx
+++ b/docs/pptx/carbo/ritu-carbo-cox-linear-ratio-death_10pct.pptx
@@ -2443,7 +2443,7 @@
           </p:nvSpPr>
           <p:spPr>
             <a:xfrm>
-              <a:off x="973953" y="2073503"/>
+              <a:off x="974732" y="2073503"/>
               <a:ext cx="0" cy="3649639"/>
             </a:xfrm>
             <a:custGeom>
@@ -2486,7 +2486,7 @@
           </p:nvSpPr>
           <p:spPr>
             <a:xfrm>
-              <a:off x="1881787" y="2073503"/>
+              <a:off x="1882345" y="2073503"/>
               <a:ext cx="0" cy="3649639"/>
             </a:xfrm>
             <a:custGeom>
@@ -2529,7 +2529,7 @@
           </p:nvSpPr>
           <p:spPr>
             <a:xfrm>
-              <a:off x="2789620" y="2073503"/>
+              <a:off x="2789957" y="2073503"/>
               <a:ext cx="0" cy="3649639"/>
             </a:xfrm>
             <a:custGeom>
@@ -2572,7 +2572,7 @@
           </p:nvSpPr>
           <p:spPr>
             <a:xfrm>
-              <a:off x="3697454" y="2073503"/>
+              <a:off x="3697570" y="2073503"/>
               <a:ext cx="0" cy="3649639"/>
             </a:xfrm>
             <a:custGeom>
@@ -2615,7 +2615,7 @@
           </p:nvSpPr>
           <p:spPr>
             <a:xfrm>
-              <a:off x="4605287" y="2073503"/>
+              <a:off x="4605182" y="2073503"/>
               <a:ext cx="0" cy="3649639"/>
             </a:xfrm>
             <a:custGeom>
@@ -2658,7 +2658,7 @@
           </p:nvSpPr>
           <p:spPr>
             <a:xfrm>
-              <a:off x="5513120" y="2073503"/>
+              <a:off x="5512795" y="2073503"/>
               <a:ext cx="0" cy="3649639"/>
             </a:xfrm>
             <a:custGeom>
@@ -2701,7 +2701,7 @@
           </p:nvSpPr>
           <p:spPr>
             <a:xfrm>
-              <a:off x="6420954" y="2073503"/>
+              <a:off x="6420407" y="2073503"/>
               <a:ext cx="0" cy="3649639"/>
             </a:xfrm>
             <a:custGeom>
@@ -2744,7 +2744,7 @@
           </p:nvSpPr>
           <p:spPr>
             <a:xfrm>
-              <a:off x="7328787" y="2073503"/>
+              <a:off x="7328020" y="2073503"/>
               <a:ext cx="0" cy="3649639"/>
             </a:xfrm>
             <a:custGeom>
@@ -2787,7 +2787,7 @@
           </p:nvSpPr>
           <p:spPr>
             <a:xfrm>
-              <a:off x="8236620" y="2073503"/>
+              <a:off x="8235632" y="2073503"/>
               <a:ext cx="0" cy="3649639"/>
             </a:xfrm>
             <a:custGeom>
@@ -3045,7 +3045,7 @@
           </p:nvSpPr>
           <p:spPr>
             <a:xfrm>
-              <a:off x="1427870" y="2073503"/>
+              <a:off x="1428538" y="2073503"/>
               <a:ext cx="0" cy="3649639"/>
             </a:xfrm>
             <a:custGeom>
@@ -3088,7 +3088,7 @@
           </p:nvSpPr>
           <p:spPr>
             <a:xfrm>
-              <a:off x="2335703" y="2073503"/>
+              <a:off x="2336151" y="2073503"/>
               <a:ext cx="0" cy="3649639"/>
             </a:xfrm>
             <a:custGeom>
@@ -3131,7 +3131,7 @@
           </p:nvSpPr>
           <p:spPr>
             <a:xfrm>
-              <a:off x="3243537" y="2073503"/>
+              <a:off x="3243764" y="2073503"/>
               <a:ext cx="0" cy="3649639"/>
             </a:xfrm>
             <a:custGeom>
@@ -3174,7 +3174,7 @@
           </p:nvSpPr>
           <p:spPr>
             <a:xfrm>
-              <a:off x="4151370" y="2073503"/>
+              <a:off x="4151376" y="2073503"/>
               <a:ext cx="0" cy="3649639"/>
             </a:xfrm>
             <a:custGeom>
@@ -3217,7 +3217,7 @@
           </p:nvSpPr>
           <p:spPr>
             <a:xfrm>
-              <a:off x="5059204" y="2073503"/>
+              <a:off x="5058989" y="2073503"/>
               <a:ext cx="0" cy="3649639"/>
             </a:xfrm>
             <a:custGeom>
@@ -3260,7 +3260,7 @@
           </p:nvSpPr>
           <p:spPr>
             <a:xfrm>
-              <a:off x="5967037" y="2073503"/>
+              <a:off x="5966601" y="2073503"/>
               <a:ext cx="0" cy="3649639"/>
             </a:xfrm>
             <a:custGeom>
@@ -3303,7 +3303,7 @@
           </p:nvSpPr>
           <p:spPr>
             <a:xfrm>
-              <a:off x="6874870" y="2073503"/>
+              <a:off x="6874214" y="2073503"/>
               <a:ext cx="0" cy="3649639"/>
             </a:xfrm>
             <a:custGeom>
@@ -3346,7 +3346,7 @@
           </p:nvSpPr>
           <p:spPr>
             <a:xfrm>
-              <a:off x="7782704" y="2073503"/>
+              <a:off x="7781826" y="2073503"/>
               <a:ext cx="0" cy="3649639"/>
             </a:xfrm>
             <a:custGeom>
@@ -4670,198 +4670,207 @@
           </p:nvSpPr>
           <p:spPr>
             <a:xfrm>
-              <a:off x="3937549" y="2073503"/>
-              <a:ext cx="4325129" cy="3483746"/>
+              <a:off x="3748464" y="2073503"/>
+              <a:ext cx="4514214" cy="3483729"/>
             </a:xfrm>
             <a:custGeom>
               <a:avLst/>
               <a:pathLst>
-                <a:path w="4325129" h="3483746">
+                <a:path w="4514214" h="3483729">
                   <a:moveTo>
                     <a:pt x="0" y="0"/>
                   </a:moveTo>
                   <a:lnTo>
-                    <a:pt x="27778" y="446787"/>
-                  </a:lnTo>
-                  <a:lnTo>
-                    <a:pt x="99400" y="1281967"/>
-                  </a:lnTo>
-                  <a:lnTo>
-                    <a:pt x="171023" y="1887468"/>
-                  </a:lnTo>
-                  <a:lnTo>
-                    <a:pt x="242645" y="2326453"/>
-                  </a:lnTo>
-                  <a:lnTo>
-                    <a:pt x="314268" y="2644715"/>
-                  </a:lnTo>
-                  <a:lnTo>
-                    <a:pt x="385890" y="2875453"/>
-                  </a:lnTo>
-                  <a:lnTo>
-                    <a:pt x="457513" y="3042737"/>
-                  </a:lnTo>
-                  <a:lnTo>
-                    <a:pt x="529135" y="3164017"/>
-                  </a:lnTo>
-                  <a:lnTo>
-                    <a:pt x="600758" y="3251944"/>
-                  </a:lnTo>
-                  <a:lnTo>
-                    <a:pt x="672381" y="3315691"/>
-                  </a:lnTo>
-                  <a:lnTo>
-                    <a:pt x="744003" y="3361907"/>
-                  </a:lnTo>
-                  <a:lnTo>
-                    <a:pt x="815626" y="3395414"/>
-                  </a:lnTo>
-                  <a:lnTo>
-                    <a:pt x="887248" y="3419706"/>
-                  </a:lnTo>
-                  <a:lnTo>
-                    <a:pt x="958871" y="3437317"/>
-                  </a:lnTo>
-                  <a:lnTo>
-                    <a:pt x="1030493" y="3450085"/>
-                  </a:lnTo>
-                  <a:lnTo>
-                    <a:pt x="1102116" y="3459342"/>
-                  </a:lnTo>
-                  <a:lnTo>
-                    <a:pt x="1173738" y="3466054"/>
-                  </a:lnTo>
-                  <a:lnTo>
-                    <a:pt x="1245361" y="3470919"/>
-                  </a:lnTo>
-                  <a:lnTo>
-                    <a:pt x="1316983" y="3474447"/>
-                  </a:lnTo>
-                  <a:lnTo>
-                    <a:pt x="1388606" y="3477004"/>
-                  </a:lnTo>
-                  <a:lnTo>
-                    <a:pt x="1460228" y="3478858"/>
-                  </a:lnTo>
-                  <a:lnTo>
-                    <a:pt x="1531851" y="3480203"/>
-                  </a:lnTo>
-                  <a:lnTo>
-                    <a:pt x="1603473" y="3481177"/>
-                  </a:lnTo>
-                  <a:lnTo>
-                    <a:pt x="1675096" y="3481884"/>
-                  </a:lnTo>
-                  <a:lnTo>
-                    <a:pt x="1746718" y="3482396"/>
-                  </a:lnTo>
-                  <a:lnTo>
-                    <a:pt x="1818341" y="3482767"/>
-                  </a:lnTo>
-                  <a:lnTo>
-                    <a:pt x="1889963" y="3483037"/>
-                  </a:lnTo>
-                  <a:lnTo>
-                    <a:pt x="1961586" y="3483232"/>
-                  </a:lnTo>
-                  <a:lnTo>
-                    <a:pt x="2033209" y="3483373"/>
-                  </a:lnTo>
-                  <a:lnTo>
-                    <a:pt x="2104831" y="3483476"/>
-                  </a:lnTo>
-                  <a:lnTo>
-                    <a:pt x="2176454" y="3483550"/>
-                  </a:lnTo>
-                  <a:lnTo>
-                    <a:pt x="2248076" y="3483604"/>
-                  </a:lnTo>
-                  <a:lnTo>
-                    <a:pt x="2319699" y="3483643"/>
-                  </a:lnTo>
-                  <a:lnTo>
-                    <a:pt x="2391321" y="3483672"/>
-                  </a:lnTo>
-                  <a:lnTo>
-                    <a:pt x="2462944" y="3483692"/>
-                  </a:lnTo>
-                  <a:lnTo>
-                    <a:pt x="2534566" y="3483707"/>
-                  </a:lnTo>
-                  <a:lnTo>
-                    <a:pt x="2606189" y="3483718"/>
-                  </a:lnTo>
-                  <a:lnTo>
-                    <a:pt x="2677811" y="3483726"/>
-                  </a:lnTo>
-                  <a:lnTo>
-                    <a:pt x="2749434" y="3483731"/>
-                  </a:lnTo>
-                  <a:lnTo>
-                    <a:pt x="2821056" y="3483736"/>
-                  </a:lnTo>
-                  <a:lnTo>
-                    <a:pt x="2892679" y="3483739"/>
-                  </a:lnTo>
-                  <a:lnTo>
-                    <a:pt x="2964301" y="3483741"/>
-                  </a:lnTo>
-                  <a:lnTo>
-                    <a:pt x="3035924" y="3483742"/>
-                  </a:lnTo>
-                  <a:lnTo>
-                    <a:pt x="3107546" y="3483743"/>
-                  </a:lnTo>
-                  <a:lnTo>
-                    <a:pt x="3179169" y="3483744"/>
-                  </a:lnTo>
-                  <a:lnTo>
-                    <a:pt x="3250791" y="3483745"/>
-                  </a:lnTo>
-                  <a:lnTo>
-                    <a:pt x="3322414" y="3483745"/>
-                  </a:lnTo>
-                  <a:lnTo>
-                    <a:pt x="3394037" y="3483746"/>
-                  </a:lnTo>
-                  <a:lnTo>
-                    <a:pt x="3465659" y="3483746"/>
-                  </a:lnTo>
-                  <a:lnTo>
-                    <a:pt x="3537282" y="3483746"/>
-                  </a:lnTo>
-                  <a:lnTo>
-                    <a:pt x="3608904" y="3483746"/>
-                  </a:lnTo>
-                  <a:lnTo>
-                    <a:pt x="3680527" y="3483746"/>
-                  </a:lnTo>
-                  <a:lnTo>
-                    <a:pt x="3752149" y="3483746"/>
-                  </a:lnTo>
-                  <a:lnTo>
-                    <a:pt x="3823772" y="3483746"/>
-                  </a:lnTo>
-                  <a:lnTo>
-                    <a:pt x="3895394" y="3483746"/>
-                  </a:lnTo>
-                  <a:lnTo>
-                    <a:pt x="3967017" y="3483746"/>
-                  </a:lnTo>
-                  <a:lnTo>
-                    <a:pt x="4038639" y="3483746"/>
-                  </a:lnTo>
-                  <a:lnTo>
-                    <a:pt x="4110262" y="3483746"/>
-                  </a:lnTo>
-                  <a:lnTo>
-                    <a:pt x="4181884" y="3483746"/>
-                  </a:lnTo>
-                  <a:lnTo>
-                    <a:pt x="4253507" y="3483746"/>
-                  </a:lnTo>
-                  <a:lnTo>
-                    <a:pt x="4325129" y="3483746"/>
+                    <a:pt x="1995" y="20632"/>
+                  </a:lnTo>
+                  <a:lnTo>
+                    <a:pt x="73618" y="630655"/>
+                  </a:lnTo>
+                  <a:lnTo>
+                    <a:pt x="145240" y="1133224"/>
+                  </a:lnTo>
+                  <a:lnTo>
+                    <a:pt x="216863" y="1547266"/>
+                  </a:lnTo>
+                  <a:lnTo>
+                    <a:pt x="288485" y="1888374"/>
+                  </a:lnTo>
+                  <a:lnTo>
+                    <a:pt x="360108" y="2169397"/>
+                  </a:lnTo>
+                  <a:lnTo>
+                    <a:pt x="431730" y="2400918"/>
+                  </a:lnTo>
+                  <a:lnTo>
+                    <a:pt x="503353" y="2591657"/>
+                  </a:lnTo>
+                  <a:lnTo>
+                    <a:pt x="574975" y="2748797"/>
+                  </a:lnTo>
+                  <a:lnTo>
+                    <a:pt x="646598" y="2878258"/>
+                  </a:lnTo>
+                  <a:lnTo>
+                    <a:pt x="718221" y="2984914"/>
+                  </a:lnTo>
+                  <a:lnTo>
+                    <a:pt x="789843" y="3072783"/>
+                  </a:lnTo>
+                  <a:lnTo>
+                    <a:pt x="861466" y="3145173"/>
+                  </a:lnTo>
+                  <a:lnTo>
+                    <a:pt x="933088" y="3204813"/>
+                  </a:lnTo>
+                  <a:lnTo>
+                    <a:pt x="1004711" y="3253946"/>
+                  </a:lnTo>
+                  <a:lnTo>
+                    <a:pt x="1076333" y="3294425"/>
+                  </a:lnTo>
+                  <a:lnTo>
+                    <a:pt x="1147956" y="3327774"/>
+                  </a:lnTo>
+                  <a:lnTo>
+                    <a:pt x="1219578" y="3355248"/>
+                  </a:lnTo>
+                  <a:lnTo>
+                    <a:pt x="1291201" y="3377883"/>
+                  </a:lnTo>
+                  <a:lnTo>
+                    <a:pt x="1362823" y="3396531"/>
+                  </a:lnTo>
+                  <a:lnTo>
+                    <a:pt x="1434446" y="3411894"/>
+                  </a:lnTo>
+                  <a:lnTo>
+                    <a:pt x="1506068" y="3424551"/>
+                  </a:lnTo>
+                  <a:lnTo>
+                    <a:pt x="1577691" y="3434978"/>
+                  </a:lnTo>
+                  <a:lnTo>
+                    <a:pt x="1649313" y="3443568"/>
+                  </a:lnTo>
+                  <a:lnTo>
+                    <a:pt x="1720936" y="3450646"/>
+                  </a:lnTo>
+                  <a:lnTo>
+                    <a:pt x="1792558" y="3456476"/>
+                  </a:lnTo>
+                  <a:lnTo>
+                    <a:pt x="1864181" y="3461280"/>
+                  </a:lnTo>
+                  <a:lnTo>
+                    <a:pt x="1935803" y="3465237"/>
+                  </a:lnTo>
+                  <a:lnTo>
+                    <a:pt x="2007426" y="3468498"/>
+                  </a:lnTo>
+                  <a:lnTo>
+                    <a:pt x="2079049" y="3471184"/>
+                  </a:lnTo>
+                  <a:lnTo>
+                    <a:pt x="2150671" y="3473397"/>
+                  </a:lnTo>
+                  <a:lnTo>
+                    <a:pt x="2222294" y="3475220"/>
+                  </a:lnTo>
+                  <a:lnTo>
+                    <a:pt x="2293916" y="3476722"/>
+                  </a:lnTo>
+                  <a:lnTo>
+                    <a:pt x="2365539" y="3477959"/>
+                  </a:lnTo>
+                  <a:lnTo>
+                    <a:pt x="2437161" y="3478979"/>
+                  </a:lnTo>
+                  <a:lnTo>
+                    <a:pt x="2508784" y="3479818"/>
+                  </a:lnTo>
+                  <a:lnTo>
+                    <a:pt x="2580406" y="3480510"/>
+                  </a:lnTo>
+                  <a:lnTo>
+                    <a:pt x="2652029" y="3481080"/>
+                  </a:lnTo>
+                  <a:lnTo>
+                    <a:pt x="2723651" y="3481550"/>
+                  </a:lnTo>
+                  <a:lnTo>
+                    <a:pt x="2795274" y="3481937"/>
+                  </a:lnTo>
+                  <a:lnTo>
+                    <a:pt x="2866896" y="3482256"/>
+                  </a:lnTo>
+                  <a:lnTo>
+                    <a:pt x="2938519" y="3482518"/>
+                  </a:lnTo>
+                  <a:lnTo>
+                    <a:pt x="3010141" y="3482735"/>
+                  </a:lnTo>
+                  <a:lnTo>
+                    <a:pt x="3081764" y="3482913"/>
+                  </a:lnTo>
+                  <a:lnTo>
+                    <a:pt x="3153386" y="3483060"/>
+                  </a:lnTo>
+                  <a:lnTo>
+                    <a:pt x="3225009" y="3483181"/>
+                  </a:lnTo>
+                  <a:lnTo>
+                    <a:pt x="3296631" y="3483280"/>
+                  </a:lnTo>
+                  <a:lnTo>
+                    <a:pt x="3368254" y="3483362"/>
+                  </a:lnTo>
+                  <a:lnTo>
+                    <a:pt x="3439877" y="3483430"/>
+                  </a:lnTo>
+                  <a:lnTo>
+                    <a:pt x="3511499" y="3483486"/>
+                  </a:lnTo>
+                  <a:lnTo>
+                    <a:pt x="3583122" y="3483532"/>
+                  </a:lnTo>
+                  <a:lnTo>
+                    <a:pt x="3654744" y="3483569"/>
+                  </a:lnTo>
+                  <a:lnTo>
+                    <a:pt x="3726367" y="3483601"/>
+                  </a:lnTo>
+                  <a:lnTo>
+                    <a:pt x="3797989" y="3483626"/>
+                  </a:lnTo>
+                  <a:lnTo>
+                    <a:pt x="3869612" y="3483647"/>
+                  </a:lnTo>
+                  <a:lnTo>
+                    <a:pt x="3941234" y="3483665"/>
+                  </a:lnTo>
+                  <a:lnTo>
+                    <a:pt x="4012857" y="3483679"/>
+                  </a:lnTo>
+                  <a:lnTo>
+                    <a:pt x="4084479" y="3483691"/>
+                  </a:lnTo>
+                  <a:lnTo>
+                    <a:pt x="4156102" y="3483701"/>
+                  </a:lnTo>
+                  <a:lnTo>
+                    <a:pt x="4227724" y="3483709"/>
+                  </a:lnTo>
+                  <a:lnTo>
+                    <a:pt x="4299347" y="3483715"/>
+                  </a:lnTo>
+                  <a:lnTo>
+                    <a:pt x="4370969" y="3483721"/>
+                  </a:lnTo>
+                  <a:lnTo>
+                    <a:pt x="4442592" y="3483725"/>
+                  </a:lnTo>
+                  <a:lnTo>
+                    <a:pt x="4514214" y="3483729"/>
                   </a:lnTo>
                 </a:path>
               </a:pathLst>
@@ -4933,7 +4942,7 @@
           </p:nvSpPr>
           <p:spPr>
             <a:xfrm>
-              <a:off x="4254372" y="2073503"/>
+              <a:off x="4278722" y="2073503"/>
               <a:ext cx="0" cy="3649639"/>
             </a:xfrm>
             <a:custGeom>
@@ -5206,7 +5215,7 @@
           </p:nvSpPr>
           <p:spPr>
             <a:xfrm>
-              <a:off x="1347083" y="5785772"/>
+              <a:off x="1347751" y="5785772"/>
               <a:ext cx="161574" cy="80101"/>
             </a:xfrm>
             <a:prstGeom prst="rect">
@@ -5252,7 +5261,7 @@
           </p:nvSpPr>
           <p:spPr>
             <a:xfrm>
-              <a:off x="2254916" y="5785772"/>
+              <a:off x="2255364" y="5785772"/>
               <a:ext cx="161574" cy="80101"/>
             </a:xfrm>
             <a:prstGeom prst="rect">
@@ -5298,7 +5307,7 @@
           </p:nvSpPr>
           <p:spPr>
             <a:xfrm>
-              <a:off x="3162750" y="5785772"/>
+              <a:off x="3162976" y="5785772"/>
               <a:ext cx="161574" cy="80101"/>
             </a:xfrm>
             <a:prstGeom prst="rect">
@@ -5344,7 +5353,7 @@
           </p:nvSpPr>
           <p:spPr>
             <a:xfrm>
-              <a:off x="4120281" y="5785772"/>
+              <a:off x="4120286" y="5785772"/>
               <a:ext cx="62179" cy="80101"/>
             </a:xfrm>
             <a:prstGeom prst="rect">
@@ -5390,7 +5399,7 @@
           </p:nvSpPr>
           <p:spPr>
             <a:xfrm>
-              <a:off x="4997024" y="5785772"/>
+              <a:off x="4996809" y="5785772"/>
               <a:ext cx="124358" cy="80101"/>
             </a:xfrm>
             <a:prstGeom prst="rect">
@@ -5436,7 +5445,7 @@
           </p:nvSpPr>
           <p:spPr>
             <a:xfrm>
-              <a:off x="5904858" y="5785772"/>
+              <a:off x="5904422" y="5785772"/>
               <a:ext cx="124358" cy="80101"/>
             </a:xfrm>
             <a:prstGeom prst="rect">
@@ -5482,7 +5491,7 @@
           </p:nvSpPr>
           <p:spPr>
             <a:xfrm>
-              <a:off x="6812691" y="5785772"/>
+              <a:off x="6812034" y="5785772"/>
               <a:ext cx="124358" cy="80101"/>
             </a:xfrm>
             <a:prstGeom prst="rect">
@@ -5528,7 +5537,7 @@
           </p:nvSpPr>
           <p:spPr>
             <a:xfrm>
-              <a:off x="7720525" y="5785772"/>
+              <a:off x="7719647" y="5785772"/>
               <a:ext cx="124358" cy="80101"/>
             </a:xfrm>
             <a:prstGeom prst="rect">
@@ -5667,7 +5676,7 @@
           <p:spPr>
             <a:xfrm>
               <a:off x="817517" y="1896563"/>
-              <a:ext cx="6928134" cy="82021"/>
+              <a:ext cx="6801032" cy="82021"/>
             </a:xfrm>
             <a:prstGeom prst="rect">
               <a:avLst/>
@@ -5699,7 +5708,7 @@
                   <a:latin typeface="Helvetica"/>
                   <a:cs typeface="Helvetica"/>
                 </a:rPr>
-                <a:t>HR per 10 % decline: 58.92 (0.00-Inf), p_Bonf = 1.000 (n = 6)  |  per IQR decline (Δ = 26.4 %): 48103.54 (0.00-Inf)  |  IQR: [-11.1, 15.3] %</a:t>
+                <a:t>HR per 10 % decline: 11.65 (0.00-Inf), p_Bonf = 1.000 (n = 6)  |  per IQR decline (Δ = 26.4 %): 655.33 (0.00-Inf)  |  IQR: [-11.1, 15.4] %</a:t>
               </a:r>
             </a:p>
           </p:txBody>
